--- a/docs/EcoTrack_DevOps_Apresentacao.pptx
+++ b/docs/EcoTrack_DevOps_Apresentacao.pptx
@@ -3490,9 +3490,107 @@
           </a:p>
         </p:txBody>
       </p:sp>
+      <p:sp>
+        <p:nvSpPr>
+          <p:cNvPr id="14" name="Legenda print Print 2: job Build"/>
+          <p:cNvSpPr txBox="1"/>
+          <p:nvPr/>
+        </p:nvSpPr>
+        <p:spPr>
+          <a:xfrm>
+            <a:off x="-421640" y="3665855"/>
+            <a:ext cx="4892040" cy="822960"/>
+          </a:xfrm>
+          <a:prstGeom prst="rect">
+            <a:avLst/>
+          </a:prstGeom>
+          <a:noFill/>
+        </p:spPr>
+        <p:txBody>
+          <a:bodyPr wrap="square" lIns="0" tIns="0" rIns="0" bIns="0" rtlCol="0" anchor="t"/>
+          <a:lstStyle/>
+          <a:p>
+            <a:pPr marL="0" indent="0" algn="ctr">
+              <a:buNone/>
+            </a:pPr>
+            <a:r>
+              <a:rPr lang="en-US" sz="1500" b="1" dirty="0">
+                <a:solidFill>
+                  <a:schemeClr val="tx2"/>
+                </a:solidFill>
+              </a:rPr>
+              <a:t>Print 2: job Build</a:t>
+            </a:r>
+            <a:endParaRPr lang="en-US" sz="1400" dirty="0"/>
+          </a:p>
+          <a:p>
+            <a:pPr marL="0" indent="0" algn="ctr">
+              <a:buNone/>
+            </a:pPr>
+            <a:r>
+              <a:rPr lang="en-US" sz="1100" dirty="0">
+                <a:solidFill>
+                  <a:schemeClr val="accent6"/>
+                </a:solidFill>
+              </a:rPr>
+              <a:t>Abra o job 🔨 Build com os passos expandidos</a:t>
+            </a:r>
+            <a:endParaRPr lang="en-US" sz="1400" dirty="0"/>
+          </a:p>
+        </p:txBody>
+      </p:sp>
+      <p:sp>
+        <p:nvSpPr>
+          <p:cNvPr id="17" name="Legenda print Print 3: testes automatizados"/>
+          <p:cNvSpPr txBox="1"/>
+          <p:nvPr/>
+        </p:nvSpPr>
+        <p:spPr>
+          <a:xfrm>
+            <a:off x="8472170" y="3665855"/>
+            <a:ext cx="4892040" cy="822960"/>
+          </a:xfrm>
+          <a:prstGeom prst="rect">
+            <a:avLst/>
+          </a:prstGeom>
+          <a:noFill/>
+        </p:spPr>
+        <p:txBody>
+          <a:bodyPr wrap="square" lIns="0" tIns="0" rIns="0" bIns="0" rtlCol="0" anchor="t"/>
+          <a:lstStyle/>
+          <a:p>
+            <a:pPr marL="0" indent="0" algn="ctr">
+              <a:buNone/>
+            </a:pPr>
+            <a:r>
+              <a:rPr lang="en-US" sz="1500" b="1" dirty="0">
+                <a:solidFill>
+                  <a:schemeClr val="tx2"/>
+                </a:solidFill>
+              </a:rPr>
+              <a:t>Print 3: testes automatizados</a:t>
+            </a:r>
+            <a:endParaRPr lang="en-US" sz="1400" dirty="0"/>
+          </a:p>
+          <a:p>
+            <a:pPr marL="0" indent="0" algn="ctr">
+              <a:buNone/>
+            </a:pPr>
+            <a:r>
+              <a:rPr lang="en-US" sz="1100" dirty="0">
+                <a:solidFill>
+                  <a:schemeClr val="accent6"/>
+                </a:solidFill>
+              </a:rPr>
+              <a:t>Resumo 🧪 (total/passaram) ou aba Checks com o relatório</a:t>
+            </a:r>
+            <a:endParaRPr lang="en-US" sz="1400" dirty="0"/>
+          </a:p>
+        </p:txBody>
+      </p:sp>
       <p:pic>
         <p:nvPicPr>
-          <p:cNvPr id="4" name="Imagem 3"/>
+          <p:cNvPr id="3" name="Imagem 2"/>
           <p:cNvPicPr>
             <a:picLocks noChangeAspect="1"/>
           </p:cNvPicPr>
@@ -3506,66 +3604,17 @@
         </p:blipFill>
         <p:spPr>
           <a:xfrm>
-            <a:off x="2409190" y="708660"/>
-            <a:ext cx="7343140" cy="3545840"/>
+            <a:off x="3208655" y="732790"/>
+            <a:ext cx="6203315" cy="3088640"/>
           </a:xfrm>
           <a:prstGeom prst="rect">
             <a:avLst/>
           </a:prstGeom>
         </p:spPr>
       </p:pic>
-      <p:sp>
-        <p:nvSpPr>
-          <p:cNvPr id="14" name="Legenda print Print 2: job Build"/>
-          <p:cNvSpPr txBox="1"/>
-          <p:nvPr/>
-        </p:nvSpPr>
-        <p:spPr>
-          <a:xfrm>
-            <a:off x="-421640" y="3665855"/>
-            <a:ext cx="4892040" cy="822960"/>
-          </a:xfrm>
-          <a:prstGeom prst="rect">
-            <a:avLst/>
-          </a:prstGeom>
-          <a:noFill/>
-        </p:spPr>
-        <p:txBody>
-          <a:bodyPr wrap="square" lIns="0" tIns="0" rIns="0" bIns="0" rtlCol="0" anchor="t"/>
-          <a:lstStyle/>
-          <a:p>
-            <a:pPr marL="0" indent="0" algn="ctr">
-              <a:buNone/>
-            </a:pPr>
-            <a:r>
-              <a:rPr lang="en-US" sz="1500" b="1" dirty="0">
-                <a:solidFill>
-                  <a:schemeClr val="tx2"/>
-                </a:solidFill>
-              </a:rPr>
-              <a:t>Print 2: job Build</a:t>
-            </a:r>
-            <a:endParaRPr lang="en-US" sz="1400" dirty="0"/>
-          </a:p>
-          <a:p>
-            <a:pPr marL="0" indent="0" algn="ctr">
-              <a:buNone/>
-            </a:pPr>
-            <a:r>
-              <a:rPr lang="en-US" sz="1100" dirty="0">
-                <a:solidFill>
-                  <a:schemeClr val="accent6"/>
-                </a:solidFill>
-              </a:rPr>
-              <a:t>Abra o job 🔨 Build com os passos expandidos</a:t>
-            </a:r>
-            <a:endParaRPr lang="en-US" sz="1400" dirty="0"/>
-          </a:p>
-        </p:txBody>
-      </p:sp>
       <p:pic>
         <p:nvPicPr>
-          <p:cNvPr id="15" name="Imagem 14"/>
+          <p:cNvPr id="5" name="Imagem 4"/>
           <p:cNvPicPr>
             <a:picLocks noChangeAspect="1"/>
           </p:cNvPicPr>
@@ -3579,66 +3628,17 @@
         </p:blipFill>
         <p:spPr>
           <a:xfrm>
-            <a:off x="0" y="3929380"/>
-            <a:ext cx="6129020" cy="2778760"/>
+            <a:off x="-45720" y="3929380"/>
+            <a:ext cx="6130925" cy="2525395"/>
           </a:xfrm>
           <a:prstGeom prst="rect">
             <a:avLst/>
           </a:prstGeom>
         </p:spPr>
       </p:pic>
-      <p:sp>
-        <p:nvSpPr>
-          <p:cNvPr id="17" name="Legenda print Print 3: testes automatizados"/>
-          <p:cNvSpPr txBox="1"/>
-          <p:nvPr/>
-        </p:nvSpPr>
-        <p:spPr>
-          <a:xfrm>
-            <a:off x="8472170" y="3665855"/>
-            <a:ext cx="4892040" cy="822960"/>
-          </a:xfrm>
-          <a:prstGeom prst="rect">
-            <a:avLst/>
-          </a:prstGeom>
-          <a:noFill/>
-        </p:spPr>
-        <p:txBody>
-          <a:bodyPr wrap="square" lIns="0" tIns="0" rIns="0" bIns="0" rtlCol="0" anchor="t"/>
-          <a:lstStyle/>
-          <a:p>
-            <a:pPr marL="0" indent="0" algn="ctr">
-              <a:buNone/>
-            </a:pPr>
-            <a:r>
-              <a:rPr lang="en-US" sz="1500" b="1" dirty="0">
-                <a:solidFill>
-                  <a:schemeClr val="tx2"/>
-                </a:solidFill>
-              </a:rPr>
-              <a:t>Print 3: testes automatizados</a:t>
-            </a:r>
-            <a:endParaRPr lang="en-US" sz="1400" dirty="0"/>
-          </a:p>
-          <a:p>
-            <a:pPr marL="0" indent="0" algn="ctr">
-              <a:buNone/>
-            </a:pPr>
-            <a:r>
-              <a:rPr lang="en-US" sz="1100" dirty="0">
-                <a:solidFill>
-                  <a:schemeClr val="accent6"/>
-                </a:solidFill>
-              </a:rPr>
-              <a:t>Resumo 🧪 (total/passaram) ou aba Checks com o relatório</a:t>
-            </a:r>
-            <a:endParaRPr lang="en-US" sz="1400" dirty="0"/>
-          </a:p>
-        </p:txBody>
-      </p:sp>
       <p:pic>
         <p:nvPicPr>
-          <p:cNvPr id="16" name="Imagem 15"/>
+          <p:cNvPr id="6" name="Imagem 5"/>
           <p:cNvPicPr>
             <a:picLocks noChangeAspect="1"/>
           </p:cNvPicPr>
@@ -3652,8 +3652,8 @@
         </p:blipFill>
         <p:spPr>
           <a:xfrm>
-            <a:off x="6231255" y="3929380"/>
-            <a:ext cx="5960745" cy="2745740"/>
+            <a:off x="5991860" y="3929380"/>
+            <a:ext cx="6192520" cy="2774950"/>
           </a:xfrm>
           <a:prstGeom prst="rect">
             <a:avLst/>
@@ -3754,7 +3754,7 @@
         </p:nvSpPr>
         <p:spPr>
           <a:xfrm>
-            <a:off x="878205" y="1021080"/>
+            <a:off x="-206375" y="1073785"/>
             <a:ext cx="4892040" cy="822960"/>
           </a:xfrm>
           <a:prstGeom prst="rect">
@@ -3838,7 +3838,7 @@
                   <a:schemeClr val="accent6"/>
                 </a:solidFill>
               </a:rPr>
-              <a:t>Página inicial do repo → Deployments: staging e production ativos</a:t>
+              <a:t>: staging e production ativos</a:t>
             </a:r>
             <a:endParaRPr lang="en-US" sz="1400" dirty="0"/>
           </a:p>
@@ -3901,7 +3901,7 @@
         </p:nvSpPr>
         <p:spPr>
           <a:xfrm>
-            <a:off x="6505575" y="4108450"/>
+            <a:off x="6505575" y="3978275"/>
             <a:ext cx="4892040" cy="822960"/>
           </a:xfrm>
           <a:prstGeom prst="rect">
@@ -3981,9 +3981,60 @@
           </a:p>
         </p:txBody>
       </p:sp>
+      <p:sp>
+        <p:nvSpPr>
+          <p:cNvPr id="9" name="Dica evidências"/>
+          <p:cNvSpPr txBox="1"/>
+          <p:nvPr/>
+        </p:nvSpPr>
+        <p:spPr>
+          <a:xfrm>
+            <a:off x="548640" y="5943600"/>
+            <a:ext cx="11439525" cy="914400"/>
+          </a:xfrm>
+          <a:prstGeom prst="rect">
+            <a:avLst/>
+          </a:prstGeom>
+          <a:noFill/>
+        </p:spPr>
+        <p:txBody>
+          <a:bodyPr wrap="square" lIns="0" tIns="0" rIns="0" bIns="0" rtlCol="0" anchor="t"/>
+          <a:lstStyle/>
+          <a:p>
+            <a:pPr marL="0" indent="0">
+              <a:buNone/>
+            </a:pPr>
+            <a:r>
+              <a:rPr lang="en-US" sz="1400" i="1" dirty="0">
+                <a:solidFill>
+                  <a:schemeClr val="accent6"/>
+                </a:solidFill>
+              </a:rPr>
+              <a:t>Execução com tudo verde: github.com/AnaluArcanjo/ecotrack-devops/</a:t>
+            </a:r>
+            <a:r>
+              <a:rPr lang="en-US" altLang="pt-BR" sz="1400" i="1" dirty="0">
+                <a:solidFill>
+                  <a:schemeClr val="accent6"/>
+                </a:solidFill>
+              </a:rPr>
+              <a:t>actions/runs/38478812109</a:t>
+            </a:r>
+            <a:r>
+              <a:rPr lang="en-US" sz="1400" i="1" dirty="0">
+                <a:solidFill>
+                  <a:schemeClr val="accent6"/>
+                </a:solidFill>
+              </a:rPr>
+              <a:t>. Os artefatos evidencias-staging e evidencias-production trazem health.json, smoke-report.md e os logs da API e do banco.</a:t>
+            </a:r>
+            <a:endParaRPr lang="en-US" sz="1400" dirty="0"/>
+          </a:p>
+        </p:txBody>
+      </p:sp>
       <p:pic>
         <p:nvPicPr>
-          <p:cNvPr id="16" name="Imagem 15"/>
+          <p:cNvPr id="7" name="Imagem 6"/>
           <p:cNvPicPr>
             <a:picLocks noChangeAspect="1"/>
           </p:cNvPicPr>
@@ -3997,8 +4048,8 @@
         </p:blipFill>
         <p:spPr>
           <a:xfrm>
-            <a:off x="1132205" y="1290955"/>
-            <a:ext cx="4273550" cy="2292350"/>
+            <a:off x="0" y="1290955"/>
+            <a:ext cx="5561965" cy="2397125"/>
           </a:xfrm>
           <a:prstGeom prst="rect">
             <a:avLst/>
@@ -4007,7 +4058,7 @@
       </p:pic>
       <p:pic>
         <p:nvPicPr>
-          <p:cNvPr id="17" name="Imagem 16"/>
+          <p:cNvPr id="13" name="Imagem 12"/>
           <p:cNvPicPr>
             <a:picLocks noChangeAspect="1"/>
           </p:cNvPicPr>
@@ -4015,14 +4066,15 @@
         </p:nvPicPr>
         <p:blipFill>
           <a:blip r:embed="rId3"/>
+          <a:srcRect r="7457"/>
           <a:stretch>
             <a:fillRect/>
           </a:stretch>
         </p:blipFill>
         <p:spPr>
           <a:xfrm>
-            <a:off x="5770245" y="1290955"/>
-            <a:ext cx="6178550" cy="2494915"/>
+            <a:off x="7868920" y="1290955"/>
+            <a:ext cx="2301240" cy="2539365"/>
           </a:xfrm>
           <a:prstGeom prst="rect">
             <a:avLst/>
@@ -4031,7 +4083,7 @@
       </p:pic>
       <p:pic>
         <p:nvPicPr>
-          <p:cNvPr id="3" name="Imagem 2"/>
+          <p:cNvPr id="15" name="Imagem 14"/>
           <p:cNvPicPr>
             <a:picLocks noChangeAspect="1"/>
           </p:cNvPicPr>
@@ -4045,8 +4097,8 @@
         </p:blipFill>
         <p:spPr>
           <a:xfrm>
-            <a:off x="429895" y="4251960"/>
-            <a:ext cx="5340350" cy="1797050"/>
+            <a:off x="208915" y="4257675"/>
+            <a:ext cx="6516370" cy="1579245"/>
           </a:xfrm>
           <a:prstGeom prst="rect">
             <a:avLst/>
@@ -4055,7 +4107,7 @@
       </p:pic>
       <p:pic>
         <p:nvPicPr>
-          <p:cNvPr id="6" name="Imagem 5"/>
+          <p:cNvPr id="18" name="Imagem 17"/>
           <p:cNvPicPr>
             <a:picLocks noChangeAspect="1"/>
           </p:cNvPicPr>
@@ -4069,8 +4121,8 @@
         </p:blipFill>
         <p:spPr>
           <a:xfrm>
-            <a:off x="6311265" y="4338320"/>
-            <a:ext cx="5416550" cy="1854200"/>
+            <a:off x="5405755" y="4199890"/>
+            <a:ext cx="6734175" cy="1689100"/>
           </a:xfrm>
           <a:prstGeom prst="rect">
             <a:avLst/>
